--- a/proposals/機種分析/モンキーターンV/monkeyturn_guide_v1.pptx
+++ b/proposals/機種分析/モンキーターンV/monkeyturn_guide_v1.pptx
@@ -6650,8 +6650,8 @@
         </p:nvSpPr>
         <p:spPr>
           <a:xfrm>
-            <a:off x="8740728" y="1965960"/>
-            <a:ext cx="55000" cy="-164456"/>
+            <a:off x="8740728" y="1746504"/>
+            <a:ext cx="55000" cy="274456"/>
           </a:xfrm>
           <a:prstGeom prst="rect">
             <a:avLst/>

--- a/proposals/機種分析/モンキーターンV/monkeyturn_guide_v1.pptx
+++ b/proposals/機種分析/モンキーターンV/monkeyturn_guide_v1.pptx
@@ -6117,7 +6117,7 @@
                 </a:solidFill>
                 <a:latin typeface="游明朝"/>
               </a:rPr>
-              <a:t>ゲームフロー全体図  ──  周期からグランドスラムまで</a:t>
+              <a:t>ゲームフロー全体図  ──  メインゴールはグランドスラム（8セット完走）</a:t>
             </a:r>
           </a:p>
         </p:txBody>
@@ -6131,13 +6131,13 @@
         <p:spPr>
           <a:xfrm>
             <a:off x="164592" y="566928"/>
-            <a:ext cx="2514600" cy="960120"/>
+            <a:ext cx="2286000" cy="1508760"/>
           </a:xfrm>
           <a:prstGeom prst="rect">
             <a:avLst/>
           </a:prstGeom>
           <a:solidFill>
-            <a:srgbClr val="061024"/>
+            <a:srgbClr val="040E22"/>
           </a:solidFill>
           <a:ln w="22860">
             <a:solidFill>
@@ -6176,22 +6176,22 @@
         <p:spPr>
           <a:xfrm>
             <a:off x="244592" y="616928"/>
-            <a:ext cx="2354600" cy="310000"/>
-          </a:xfrm>
-          <a:prstGeom prst="rect">
-            <a:avLst/>
-          </a:prstGeom>
-          <a:noFill/>
-        </p:spPr>
-        <p:txBody>
-          <a:bodyPr wrap="square">
-            <a:spAutoFit/>
-          </a:bodyPr>
-          <a:lstStyle/>
-          <a:p>
-            <a:pPr algn="l"/>
-            <a:r>
-              <a:rPr sz="950" b="1">
+            <a:ext cx="2126000" cy="270000"/>
+          </a:xfrm>
+          <a:prstGeom prst="rect">
+            <a:avLst/>
+          </a:prstGeom>
+          <a:noFill/>
+        </p:spPr>
+        <p:txBody>
+          <a:bodyPr wrap="square">
+            <a:spAutoFit/>
+          </a:bodyPr>
+          <a:lstStyle/>
+          <a:p>
+            <a:pPr algn="l"/>
+            <a:r>
+              <a:rPr sz="1000" b="1">
                 <a:solidFill>
                   <a:srgbClr val="FFFFFF"/>
                 </a:solidFill>
@@ -6210,8 +6210,8 @@
         </p:nvSpPr>
         <p:spPr>
           <a:xfrm>
-            <a:off x="244592" y="936928"/>
-            <a:ext cx="2354600" cy="540120"/>
+            <a:off x="244592" y="906928"/>
+            <a:ext cx="2126000" cy="900000"/>
           </a:xfrm>
           <a:prstGeom prst="rect">
             <a:avLst/>
@@ -6233,7 +6233,10 @@
                 <a:latin typeface="メイリオ"/>
               </a:rPr>
               <a:t>激走ポイント毎G加算
-ライバルモード抽選 / 周期管理</a:t>
+① 222pt到達（周期天井）
+   → 前兆「優出モード」
+② レア役直撃
+   → CZ「超抜チャレンジ」</a:t>
             </a:r>
           </a:p>
         </p:txBody>
@@ -6246,14 +6249,129 @@
         </p:nvSpPr>
         <p:spPr>
           <a:xfrm>
-            <a:off x="2880360" y="566928"/>
-            <a:ext cx="2514600" cy="960120"/>
+            <a:off x="2651760" y="566928"/>
+            <a:ext cx="2286000" cy="694944"/>
           </a:xfrm>
           <a:prstGeom prst="rect">
             <a:avLst/>
           </a:prstGeom>
           <a:solidFill>
-            <a:srgbClr val="061824"/>
+            <a:srgbClr val="001226"/>
+          </a:solidFill>
+          <a:ln w="22860">
+            <a:solidFill>
+              <a:srgbClr val="00C0C8"/>
+            </a:solidFill>
+          </a:ln>
+        </p:spPr>
+        <p:style>
+          <a:lnRef idx="1">
+            <a:schemeClr val="accent1"/>
+          </a:lnRef>
+          <a:fillRef idx="3">
+            <a:schemeClr val="accent1"/>
+          </a:fillRef>
+          <a:effectRef idx="2">
+            <a:schemeClr val="accent1"/>
+          </a:effectRef>
+          <a:fontRef idx="minor">
+            <a:schemeClr val="lt1"/>
+          </a:fontRef>
+        </p:style>
+        <p:txBody>
+          <a:bodyPr rtlCol="0" anchor="ctr"/>
+          <a:lstStyle/>
+          <a:p>
+            <a:pPr algn="ctr"/>
+          </a:p>
+        </p:txBody>
+      </p:sp>
+      <p:sp>
+        <p:nvSpPr>
+          <p:cNvPr id="10" name="TextBox 9"/>
+          <p:cNvSpPr txBox="1"/>
+          <p:nvPr/>
+        </p:nvSpPr>
+        <p:spPr>
+          <a:xfrm>
+            <a:off x="2731760" y="608928"/>
+            <a:ext cx="2126000" cy="260000"/>
+          </a:xfrm>
+          <a:prstGeom prst="rect">
+            <a:avLst/>
+          </a:prstGeom>
+          <a:noFill/>
+        </p:spPr>
+        <p:txBody>
+          <a:bodyPr wrap="square">
+            <a:spAutoFit/>
+          </a:bodyPr>
+          <a:lstStyle/>
+          <a:p>
+            <a:pPr algn="l"/>
+            <a:r>
+              <a:rPr sz="950" b="1">
+                <a:solidFill>
+                  <a:srgbClr val="00C0C8"/>
+                </a:solidFill>
+                <a:latin typeface="游明朝"/>
+              </a:rPr>
+              <a:t>前兆「優出モード」</a:t>
+            </a:r>
+          </a:p>
+        </p:txBody>
+      </p:sp>
+      <p:sp>
+        <p:nvSpPr>
+          <p:cNvPr id="11" name="TextBox 10"/>
+          <p:cNvSpPr txBox="1"/>
+          <p:nvPr/>
+        </p:nvSpPr>
+        <p:spPr>
+          <a:xfrm>
+            <a:off x="2731760" y="886928"/>
+            <a:ext cx="2126000" cy="339944"/>
+          </a:xfrm>
+          <a:prstGeom prst="rect">
+            <a:avLst/>
+          </a:prstGeom>
+          <a:noFill/>
+        </p:spPr>
+        <p:txBody>
+          <a:bodyPr wrap="square">
+            <a:spAutoFit/>
+          </a:bodyPr>
+          <a:lstStyle/>
+          <a:p>
+            <a:pPr algn="l"/>
+            <a:r>
+              <a:rPr sz="800" b="0">
+                <a:solidFill>
+                  <a:srgbClr val="E0E8F0"/>
+                </a:solidFill>
+                <a:latin typeface="メイリオ"/>
+              </a:rPr>
+              <a:t>周期天井（222pt等）で突入 / AT当選確定的</a:t>
+            </a:r>
+          </a:p>
+        </p:txBody>
+      </p:sp>
+      <p:sp>
+        <p:nvSpPr>
+          <p:cNvPr id="12" name="Rectangle 11"/>
+          <p:cNvSpPr/>
+          <p:nvPr/>
+        </p:nvSpPr>
+        <p:spPr>
+          <a:xfrm>
+            <a:off x="2651760" y="1341872"/>
+            <a:ext cx="2286000" cy="694944"/>
+          </a:xfrm>
+          <a:prstGeom prst="rect">
+            <a:avLst/>
+          </a:prstGeom>
+          <a:solidFill>
+            <a:srgbClr val="041622"/>
           </a:solidFill>
           <a:ln w="22860">
             <a:solidFill>
@@ -6285,14 +6403,14 @@
       </p:sp>
       <p:sp>
         <p:nvSpPr>
-          <p:cNvPr id="10" name="TextBox 9"/>
-          <p:cNvSpPr txBox="1"/>
-          <p:nvPr/>
-        </p:nvSpPr>
-        <p:spPr>
-          <a:xfrm>
-            <a:off x="2960360" y="616928"/>
-            <a:ext cx="2354600" cy="310000"/>
+          <p:cNvPr id="13" name="TextBox 12"/>
+          <p:cNvSpPr txBox="1"/>
+          <p:nvPr/>
+        </p:nvSpPr>
+        <p:spPr>
+          <a:xfrm>
+            <a:off x="2731760" y="1383872"/>
+            <a:ext cx="2126000" cy="260000"/>
           </a:xfrm>
           <a:prstGeom prst="rect">
             <a:avLst/>
@@ -6309,7 +6427,7 @@
             <a:r>
               <a:rPr sz="950" b="1">
                 <a:solidFill>
-                  <a:srgbClr val="FFFFFF"/>
+                  <a:srgbClr val="14887C"/>
                 </a:solidFill>
                 <a:latin typeface="游明朝"/>
               </a:rPr>
@@ -6320,14 +6438,14 @@
       </p:sp>
       <p:sp>
         <p:nvSpPr>
-          <p:cNvPr id="11" name="TextBox 10"/>
-          <p:cNvSpPr txBox="1"/>
-          <p:nvPr/>
-        </p:nvSpPr>
-        <p:spPr>
-          <a:xfrm>
-            <a:off x="2960360" y="936928"/>
-            <a:ext cx="2354600" cy="540120"/>
+          <p:cNvPr id="14" name="TextBox 13"/>
+          <p:cNvSpPr txBox="1"/>
+          <p:nvPr/>
+        </p:nvSpPr>
+        <p:spPr>
+          <a:xfrm>
+            <a:off x="2731760" y="1661872"/>
+            <a:ext cx="2126000" cy="339944"/>
           </a:xfrm>
           <a:prstGeom prst="rect">
             <a:avLst/>
@@ -6348,28 +6466,27 @@
                 </a:solidFill>
                 <a:latin typeface="メイリオ"/>
               </a:rPr>
-              <a:t>10G自力突破型 / 成功率約50%
-失敗の一部でグランドスラムCHへ</a:t>
-            </a:r>
-          </a:p>
-        </p:txBody>
-      </p:sp>
-      <p:sp>
-        <p:nvSpPr>
-          <p:cNvPr id="12" name="Rectangle 11"/>
+              <a:t>レア役直撃 / 10G自力突破 / 成功率約50%</a:t>
+            </a:r>
+          </a:p>
+        </p:txBody>
+      </p:sp>
+      <p:sp>
+        <p:nvSpPr>
+          <p:cNvPr id="15" name="Rectangle 14"/>
           <p:cNvSpPr/>
           <p:nvPr/>
         </p:nvSpPr>
         <p:spPr>
           <a:xfrm>
-            <a:off x="5596128" y="566928"/>
-            <a:ext cx="2514600" cy="960120"/>
+            <a:off x="5138928" y="566928"/>
+            <a:ext cx="2286000" cy="1508760"/>
           </a:xfrm>
           <a:prstGeom prst="rect">
             <a:avLst/>
           </a:prstGeom>
           <a:solidFill>
-            <a:srgbClr val="101806"/>
+            <a:srgbClr val="0C1604"/>
           </a:solidFill>
           <a:ln w="22860">
             <a:solidFill>
@@ -6401,29 +6518,29 @@
       </p:sp>
       <p:sp>
         <p:nvSpPr>
-          <p:cNvPr id="13" name="TextBox 12"/>
-          <p:cNvSpPr txBox="1"/>
-          <p:nvPr/>
-        </p:nvSpPr>
-        <p:spPr>
-          <a:xfrm>
-            <a:off x="5676128" y="616928"/>
-            <a:ext cx="2354600" cy="310000"/>
-          </a:xfrm>
-          <a:prstGeom prst="rect">
-            <a:avLst/>
-          </a:prstGeom>
-          <a:noFill/>
-        </p:spPr>
-        <p:txBody>
-          <a:bodyPr wrap="square">
-            <a:spAutoFit/>
-          </a:bodyPr>
-          <a:lstStyle/>
-          <a:p>
-            <a:pPr algn="l"/>
-            <a:r>
-              <a:rPr sz="950" b="1">
+          <p:cNvPr id="16" name="TextBox 15"/>
+          <p:cNvSpPr txBox="1"/>
+          <p:nvPr/>
+        </p:nvSpPr>
+        <p:spPr>
+          <a:xfrm>
+            <a:off x="5218928" y="616928"/>
+            <a:ext cx="2126000" cy="270000"/>
+          </a:xfrm>
+          <a:prstGeom prst="rect">
+            <a:avLst/>
+          </a:prstGeom>
+          <a:noFill/>
+        </p:spPr>
+        <p:txBody>
+          <a:bodyPr wrap="square">
+            <a:spAutoFit/>
+          </a:bodyPr>
+          <a:lstStyle/>
+          <a:p>
+            <a:pPr algn="l"/>
+            <a:r>
+              <a:rPr sz="1000" b="1">
                 <a:solidFill>
                   <a:srgbClr val="FFFFFF"/>
                 </a:solidFill>
@@ -6436,14 +6553,14 @@
       </p:sp>
       <p:sp>
         <p:nvSpPr>
-          <p:cNvPr id="14" name="TextBox 13"/>
-          <p:cNvSpPr txBox="1"/>
-          <p:nvPr/>
-        </p:nvSpPr>
-        <p:spPr>
-          <a:xfrm>
-            <a:off x="5676128" y="936928"/>
-            <a:ext cx="2354600" cy="540120"/>
+          <p:cNvPr id="17" name="TextBox 16"/>
+          <p:cNvSpPr txBox="1"/>
+          <p:nvPr/>
+        </p:nvSpPr>
+        <p:spPr>
+          <a:xfrm>
+            <a:off x="5218928" y="906928"/>
+            <a:ext cx="2126000" cy="900000"/>
           </a:xfrm>
           <a:prstGeom prst="rect">
             <a:avLst/>
@@ -6465,20 +6582,66 @@
                 <a:latin typeface="メイリオ"/>
               </a:rPr>
               <a:t>純増2.5枚/G
-周回31G + SGバトル9G を繰り返す</a:t>
-            </a:r>
-          </a:p>
-        </p:txBody>
-      </p:sp>
-      <p:sp>
-        <p:nvSpPr>
-          <p:cNvPr id="15" name="Can 14"/>
+周回31G + SGバトル9G
+メインゴール：
+8セット完走
+= グランドスラム達成！</a:t>
+            </a:r>
+          </a:p>
+        </p:txBody>
+      </p:sp>
+      <p:sp>
+        <p:nvSpPr>
+          <p:cNvPr id="18" name="Can 17"/>
           <p:cNvSpPr/>
           <p:nvPr/>
         </p:nvSpPr>
         <p:spPr>
           <a:xfrm>
-            <a:off x="2719192" y="971988"/>
+            <a:off x="2490592" y="839400"/>
+            <a:ext cx="121168" cy="150000"/>
+          </a:xfrm>
+          <a:prstGeom prst="can">
+            <a:avLst/>
+          </a:prstGeom>
+          <a:solidFill>
+            <a:srgbClr val="00C0C8"/>
+          </a:solidFill>
+          <a:ln>
+            <a:noFill/>
+          </a:ln>
+        </p:spPr>
+        <p:style>
+          <a:lnRef idx="1">
+            <a:schemeClr val="accent1"/>
+          </a:lnRef>
+          <a:fillRef idx="3">
+            <a:schemeClr val="accent1"/>
+          </a:fillRef>
+          <a:effectRef idx="2">
+            <a:schemeClr val="accent1"/>
+          </a:effectRef>
+          <a:fontRef idx="minor">
+            <a:schemeClr val="lt1"/>
+          </a:fontRef>
+        </p:style>
+        <p:txBody>
+          <a:bodyPr rtlCol="0" anchor="ctr"/>
+          <a:lstStyle/>
+          <a:p>
+            <a:pPr algn="ctr"/>
+          </a:p>
+        </p:txBody>
+      </p:sp>
+      <p:sp>
+        <p:nvSpPr>
+          <p:cNvPr id="19" name="Can 18"/>
+          <p:cNvSpPr/>
+          <p:nvPr/>
+        </p:nvSpPr>
+        <p:spPr>
+          <a:xfrm>
+            <a:off x="2490592" y="1614344"/>
             <a:ext cx="121168" cy="150000"/>
           </a:xfrm>
           <a:prstGeom prst="can">
@@ -6515,16 +6678,1166 @@
       </p:sp>
       <p:sp>
         <p:nvSpPr>
-          <p:cNvPr id="16" name="Can 15"/>
+          <p:cNvPr id="20" name="Can 19"/>
           <p:cNvSpPr/>
           <p:nvPr/>
         </p:nvSpPr>
         <p:spPr>
           <a:xfrm>
-            <a:off x="5434960" y="971988"/>
+            <a:off x="4977760" y="839400"/>
             <a:ext cx="121168" cy="150000"/>
           </a:xfrm>
           <a:prstGeom prst="can">
+            <a:avLst/>
+          </a:prstGeom>
+          <a:solidFill>
+            <a:srgbClr val="22CC66"/>
+          </a:solidFill>
+          <a:ln>
+            <a:noFill/>
+          </a:ln>
+        </p:spPr>
+        <p:style>
+          <a:lnRef idx="1">
+            <a:schemeClr val="accent1"/>
+          </a:lnRef>
+          <a:fillRef idx="3">
+            <a:schemeClr val="accent1"/>
+          </a:fillRef>
+          <a:effectRef idx="2">
+            <a:schemeClr val="accent1"/>
+          </a:effectRef>
+          <a:fontRef idx="minor">
+            <a:schemeClr val="lt1"/>
+          </a:fontRef>
+        </p:style>
+        <p:txBody>
+          <a:bodyPr rtlCol="0" anchor="ctr"/>
+          <a:lstStyle/>
+          <a:p>
+            <a:pPr algn="ctr"/>
+          </a:p>
+        </p:txBody>
+      </p:sp>
+      <p:sp>
+        <p:nvSpPr>
+          <p:cNvPr id="21" name="TextBox 20"/>
+          <p:cNvSpPr txBox="1"/>
+          <p:nvPr/>
+        </p:nvSpPr>
+        <p:spPr>
+          <a:xfrm>
+            <a:off x="4945760" y="694400"/>
+            <a:ext cx="251168" cy="195000"/>
+          </a:xfrm>
+          <a:prstGeom prst="rect">
+            <a:avLst/>
+          </a:prstGeom>
+          <a:noFill/>
+        </p:spPr>
+        <p:txBody>
+          <a:bodyPr wrap="square">
+            <a:spAutoFit/>
+          </a:bodyPr>
+          <a:lstStyle/>
+          <a:p>
+            <a:pPr algn="ctr"/>
+            <a:r>
+              <a:rPr sz="700" b="1">
+                <a:solidFill>
+                  <a:srgbClr val="22CC66"/>
+                </a:solidFill>
+                <a:latin typeface="メイリオ"/>
+              </a:rPr>
+              <a:t>成功</a:t>
+            </a:r>
+          </a:p>
+        </p:txBody>
+      </p:sp>
+      <p:sp>
+        <p:nvSpPr>
+          <p:cNvPr id="22" name="Can 21"/>
+          <p:cNvSpPr/>
+          <p:nvPr/>
+        </p:nvSpPr>
+        <p:spPr>
+          <a:xfrm>
+            <a:off x="4977760" y="1614344"/>
+            <a:ext cx="121168" cy="150000"/>
+          </a:xfrm>
+          <a:prstGeom prst="can">
+            <a:avLst/>
+          </a:prstGeom>
+          <a:solidFill>
+            <a:srgbClr val="22CC66"/>
+          </a:solidFill>
+          <a:ln>
+            <a:noFill/>
+          </a:ln>
+        </p:spPr>
+        <p:style>
+          <a:lnRef idx="1">
+            <a:schemeClr val="accent1"/>
+          </a:lnRef>
+          <a:fillRef idx="3">
+            <a:schemeClr val="accent1"/>
+          </a:fillRef>
+          <a:effectRef idx="2">
+            <a:schemeClr val="accent1"/>
+          </a:effectRef>
+          <a:fontRef idx="minor">
+            <a:schemeClr val="lt1"/>
+          </a:fontRef>
+        </p:style>
+        <p:txBody>
+          <a:bodyPr rtlCol="0" anchor="ctr"/>
+          <a:lstStyle/>
+          <a:p>
+            <a:pPr algn="ctr"/>
+          </a:p>
+        </p:txBody>
+      </p:sp>
+      <p:sp>
+        <p:nvSpPr>
+          <p:cNvPr id="23" name="Rectangle 22"/>
+          <p:cNvSpPr/>
+          <p:nvPr/>
+        </p:nvSpPr>
+        <p:spPr>
+          <a:xfrm>
+            <a:off x="3767260" y="2036816"/>
+            <a:ext cx="55000" cy="74000"/>
+          </a:xfrm>
+          <a:prstGeom prst="rect">
+            <a:avLst/>
+          </a:prstGeom>
+          <a:solidFill>
+            <a:srgbClr val="888888"/>
+          </a:solidFill>
+          <a:ln>
+            <a:noFill/>
+          </a:ln>
+        </p:spPr>
+        <p:style>
+          <a:lnRef idx="1">
+            <a:schemeClr val="accent1"/>
+          </a:lnRef>
+          <a:fillRef idx="3">
+            <a:schemeClr val="accent1"/>
+          </a:fillRef>
+          <a:effectRef idx="2">
+            <a:schemeClr val="accent1"/>
+          </a:effectRef>
+          <a:fontRef idx="minor">
+            <a:schemeClr val="lt1"/>
+          </a:fontRef>
+        </p:style>
+        <p:txBody>
+          <a:bodyPr rtlCol="0" anchor="ctr"/>
+          <a:lstStyle/>
+          <a:p>
+            <a:pPr algn="ctr"/>
+          </a:p>
+        </p:txBody>
+      </p:sp>
+      <p:sp>
+        <p:nvSpPr>
+          <p:cNvPr id="24" name="TextBox 23"/>
+          <p:cNvSpPr txBox="1"/>
+          <p:nvPr/>
+        </p:nvSpPr>
+        <p:spPr>
+          <a:xfrm>
+            <a:off x="3514760" y="2042816"/>
+            <a:ext cx="560000" cy="200000"/>
+          </a:xfrm>
+          <a:prstGeom prst="rect">
+            <a:avLst/>
+          </a:prstGeom>
+          <a:noFill/>
+        </p:spPr>
+        <p:txBody>
+          <a:bodyPr wrap="square">
+            <a:spAutoFit/>
+          </a:bodyPr>
+          <a:lstStyle/>
+          <a:p>
+            <a:pPr algn="ctr"/>
+            <a:r>
+              <a:rPr sz="700" b="1">
+                <a:solidFill>
+                  <a:srgbClr val="CC2222"/>
+                </a:solidFill>
+                <a:latin typeface="メイリオ"/>
+              </a:rPr>
+              <a:t>失敗</a:t>
+            </a:r>
+          </a:p>
+        </p:txBody>
+      </p:sp>
+      <p:sp>
+        <p:nvSpPr>
+          <p:cNvPr id="25" name="Rectangle 24"/>
+          <p:cNvSpPr/>
+          <p:nvPr/>
+        </p:nvSpPr>
+        <p:spPr>
+          <a:xfrm>
+            <a:off x="2651760" y="2146816"/>
+            <a:ext cx="1078992" cy="510000"/>
+          </a:xfrm>
+          <a:prstGeom prst="rect">
+            <a:avLst/>
+          </a:prstGeom>
+          <a:solidFill>
+            <a:srgbClr val="081018"/>
+          </a:solidFill>
+          <a:ln w="12700">
+            <a:solidFill>
+              <a:srgbClr val="888888"/>
+            </a:solidFill>
+          </a:ln>
+        </p:spPr>
+        <p:style>
+          <a:lnRef idx="1">
+            <a:schemeClr val="accent1"/>
+          </a:lnRef>
+          <a:fillRef idx="3">
+            <a:schemeClr val="accent1"/>
+          </a:fillRef>
+          <a:effectRef idx="2">
+            <a:schemeClr val="accent1"/>
+          </a:effectRef>
+          <a:fontRef idx="minor">
+            <a:schemeClr val="lt1"/>
+          </a:fontRef>
+        </p:style>
+        <p:txBody>
+          <a:bodyPr rtlCol="0" anchor="ctr"/>
+          <a:lstStyle/>
+          <a:p>
+            <a:pPr algn="ctr"/>
+          </a:p>
+        </p:txBody>
+      </p:sp>
+      <p:sp>
+        <p:nvSpPr>
+          <p:cNvPr id="26" name="TextBox 25"/>
+          <p:cNvSpPr txBox="1"/>
+          <p:nvPr/>
+        </p:nvSpPr>
+        <p:spPr>
+          <a:xfrm>
+            <a:off x="2706760" y="2184816"/>
+            <a:ext cx="988992" cy="225000"/>
+          </a:xfrm>
+          <a:prstGeom prst="rect">
+            <a:avLst/>
+          </a:prstGeom>
+          <a:noFill/>
+        </p:spPr>
+        <p:txBody>
+          <a:bodyPr wrap="square">
+            <a:spAutoFit/>
+          </a:bodyPr>
+          <a:lstStyle/>
+          <a:p>
+            <a:pPr algn="l"/>
+            <a:r>
+              <a:rPr sz="850" b="1">
+                <a:solidFill>
+                  <a:srgbClr val="BBBBBB"/>
+                </a:solidFill>
+                <a:latin typeface="游明朝"/>
+              </a:rPr>
+              <a:t>通常時に戻る</a:t>
+            </a:r>
+          </a:p>
+        </p:txBody>
+      </p:sp>
+      <p:sp>
+        <p:nvSpPr>
+          <p:cNvPr id="27" name="TextBox 26"/>
+          <p:cNvSpPr txBox="1"/>
+          <p:nvPr/>
+        </p:nvSpPr>
+        <p:spPr>
+          <a:xfrm>
+            <a:off x="2706760" y="2414816"/>
+            <a:ext cx="988992" cy="220000"/>
+          </a:xfrm>
+          <a:prstGeom prst="rect">
+            <a:avLst/>
+          </a:prstGeom>
+          <a:noFill/>
+        </p:spPr>
+        <p:txBody>
+          <a:bodyPr wrap="square">
+            <a:spAutoFit/>
+          </a:bodyPr>
+          <a:lstStyle/>
+          <a:p>
+            <a:pPr algn="l"/>
+            <a:r>
+              <a:rPr sz="750" b="0">
+                <a:solidFill>
+                  <a:srgbClr val="888888"/>
+                </a:solidFill>
+                <a:latin typeface="メイリオ"/>
+              </a:rPr>
+              <a:t>約50% / 次の周期へ</a:t>
+            </a:r>
+          </a:p>
+        </p:txBody>
+      </p:sp>
+      <p:sp>
+        <p:nvSpPr>
+          <p:cNvPr id="28" name="Rectangle 27"/>
+          <p:cNvSpPr/>
+          <p:nvPr/>
+        </p:nvSpPr>
+        <p:spPr>
+          <a:xfrm>
+            <a:off x="3775752" y="2146816"/>
+            <a:ext cx="1162008" cy="510000"/>
+          </a:xfrm>
+          <a:prstGeom prst="rect">
+            <a:avLst/>
+          </a:prstGeom>
+          <a:solidFill>
+            <a:srgbClr val="1C1400"/>
+          </a:solidFill>
+          <a:ln w="22860">
+            <a:solidFill>
+              <a:srgbClr val="C8A840"/>
+            </a:solidFill>
+          </a:ln>
+        </p:spPr>
+        <p:style>
+          <a:lnRef idx="1">
+            <a:schemeClr val="accent1"/>
+          </a:lnRef>
+          <a:fillRef idx="3">
+            <a:schemeClr val="accent1"/>
+          </a:fillRef>
+          <a:effectRef idx="2">
+            <a:schemeClr val="accent1"/>
+          </a:effectRef>
+          <a:fontRef idx="minor">
+            <a:schemeClr val="lt1"/>
+          </a:fontRef>
+        </p:style>
+        <p:txBody>
+          <a:bodyPr rtlCol="0" anchor="ctr"/>
+          <a:lstStyle/>
+          <a:p>
+            <a:pPr algn="ctr"/>
+          </a:p>
+        </p:txBody>
+      </p:sp>
+      <p:sp>
+        <p:nvSpPr>
+          <p:cNvPr id="29" name="TextBox 28"/>
+          <p:cNvSpPr txBox="1"/>
+          <p:nvPr/>
+        </p:nvSpPr>
+        <p:spPr>
+          <a:xfrm>
+            <a:off x="3830752" y="2184816"/>
+            <a:ext cx="1072008" cy="225000"/>
+          </a:xfrm>
+          <a:prstGeom prst="rect">
+            <a:avLst/>
+          </a:prstGeom>
+          <a:noFill/>
+        </p:spPr>
+        <p:txBody>
+          <a:bodyPr wrap="square">
+            <a:spAutoFit/>
+          </a:bodyPr>
+          <a:lstStyle/>
+          <a:p>
+            <a:pPr algn="l"/>
+            <a:r>
+              <a:rPr sz="850" b="1">
+                <a:solidFill>
+                  <a:srgbClr val="C8A840"/>
+                </a:solidFill>
+                <a:latin typeface="游明朝"/>
+              </a:rPr>
+              <a:t>グランドスラムCH</a:t>
+            </a:r>
+          </a:p>
+        </p:txBody>
+      </p:sp>
+      <p:sp>
+        <p:nvSpPr>
+          <p:cNvPr id="30" name="TextBox 29"/>
+          <p:cNvSpPr txBox="1"/>
+          <p:nvPr/>
+        </p:nvSpPr>
+        <p:spPr>
+          <a:xfrm>
+            <a:off x="3830752" y="2414816"/>
+            <a:ext cx="1072008" cy="220000"/>
+          </a:xfrm>
+          <a:prstGeom prst="rect">
+            <a:avLst/>
+          </a:prstGeom>
+          <a:noFill/>
+        </p:spPr>
+        <p:txBody>
+          <a:bodyPr wrap="square">
+            <a:spAutoFit/>
+          </a:bodyPr>
+          <a:lstStyle/>
+          <a:p>
+            <a:pPr algn="l"/>
+            <a:r>
+              <a:rPr sz="750" b="0">
+                <a:solidFill>
+                  <a:srgbClr val="E0E8F0"/>
+                </a:solidFill>
+                <a:latin typeface="メイリオ"/>
+              </a:rPr>
+              <a:t>1.2% / AT確定
+艇王シナリオ濃厚</a:t>
+            </a:r>
+          </a:p>
+        </p:txBody>
+      </p:sp>
+      <p:sp>
+        <p:nvSpPr>
+          <p:cNvPr id="31" name="Can 30"/>
+          <p:cNvSpPr/>
+          <p:nvPr/>
+        </p:nvSpPr>
+        <p:spPr>
+          <a:xfrm>
+            <a:off x="4977760" y="2326816"/>
+            <a:ext cx="121168" cy="150000"/>
+          </a:xfrm>
+          <a:prstGeom prst="can">
+            <a:avLst/>
+          </a:prstGeom>
+          <a:solidFill>
+            <a:srgbClr val="C8A840"/>
+          </a:solidFill>
+          <a:ln>
+            <a:noFill/>
+          </a:ln>
+        </p:spPr>
+        <p:style>
+          <a:lnRef idx="1">
+            <a:schemeClr val="accent1"/>
+          </a:lnRef>
+          <a:fillRef idx="3">
+            <a:schemeClr val="accent1"/>
+          </a:fillRef>
+          <a:effectRef idx="2">
+            <a:schemeClr val="accent1"/>
+          </a:effectRef>
+          <a:fontRef idx="minor">
+            <a:schemeClr val="lt1"/>
+          </a:fontRef>
+        </p:style>
+        <p:txBody>
+          <a:bodyPr rtlCol="0" anchor="ctr"/>
+          <a:lstStyle/>
+          <a:p>
+            <a:pPr algn="ctr"/>
+          </a:p>
+        </p:txBody>
+      </p:sp>
+      <p:sp>
+        <p:nvSpPr>
+          <p:cNvPr id="32" name="TextBox 31"/>
+          <p:cNvSpPr txBox="1"/>
+          <p:nvPr/>
+        </p:nvSpPr>
+        <p:spPr>
+          <a:xfrm>
+            <a:off x="4945760" y="2186816"/>
+            <a:ext cx="251168" cy="195000"/>
+          </a:xfrm>
+          <a:prstGeom prst="rect">
+            <a:avLst/>
+          </a:prstGeom>
+          <a:noFill/>
+        </p:spPr>
+        <p:txBody>
+          <a:bodyPr wrap="square">
+            <a:spAutoFit/>
+          </a:bodyPr>
+          <a:lstStyle/>
+          <a:p>
+            <a:pPr algn="ctr"/>
+            <a:r>
+              <a:rPr sz="700" b="1">
+                <a:solidFill>
+                  <a:srgbClr val="C8A840"/>
+                </a:solidFill>
+                <a:latin typeface="メイリオ"/>
+              </a:rPr>
+              <a:t>AT確定</a:t>
+            </a:r>
+          </a:p>
+        </p:txBody>
+      </p:sp>
+      <p:sp>
+        <p:nvSpPr>
+          <p:cNvPr id="33" name="Rectangle 32"/>
+          <p:cNvSpPr/>
+          <p:nvPr/>
+        </p:nvSpPr>
+        <p:spPr>
+          <a:xfrm>
+            <a:off x="7504928" y="1321308"/>
+            <a:ext cx="55000" cy="1125280"/>
+          </a:xfrm>
+          <a:prstGeom prst="rect">
+            <a:avLst/>
+          </a:prstGeom>
+          <a:solidFill>
+            <a:srgbClr val="C8A840"/>
+          </a:solidFill>
+          <a:ln>
+            <a:noFill/>
+          </a:ln>
+        </p:spPr>
+        <p:style>
+          <a:lnRef idx="1">
+            <a:schemeClr val="accent1"/>
+          </a:lnRef>
+          <a:fillRef idx="3">
+            <a:schemeClr val="accent1"/>
+          </a:fillRef>
+          <a:effectRef idx="2">
+            <a:schemeClr val="accent1"/>
+          </a:effectRef>
+          <a:fontRef idx="minor">
+            <a:schemeClr val="lt1"/>
+          </a:fontRef>
+        </p:style>
+        <p:txBody>
+          <a:bodyPr rtlCol="0" anchor="ctr"/>
+          <a:lstStyle/>
+          <a:p>
+            <a:pPr algn="ctr"/>
+          </a:p>
+        </p:txBody>
+      </p:sp>
+      <p:sp>
+        <p:nvSpPr>
+          <p:cNvPr id="34" name="Rectangle 33"/>
+          <p:cNvSpPr/>
+          <p:nvPr/>
+        </p:nvSpPr>
+        <p:spPr>
+          <a:xfrm>
+            <a:off x="7504928" y="2418588"/>
+            <a:ext cx="605000" cy="55000"/>
+          </a:xfrm>
+          <a:prstGeom prst="rect">
+            <a:avLst/>
+          </a:prstGeom>
+          <a:solidFill>
+            <a:srgbClr val="C8A840"/>
+          </a:solidFill>
+          <a:ln>
+            <a:noFill/>
+          </a:ln>
+        </p:spPr>
+        <p:style>
+          <a:lnRef idx="1">
+            <a:schemeClr val="accent1"/>
+          </a:lnRef>
+          <a:fillRef idx="3">
+            <a:schemeClr val="accent1"/>
+          </a:fillRef>
+          <a:effectRef idx="2">
+            <a:schemeClr val="accent1"/>
+          </a:effectRef>
+          <a:fontRef idx="minor">
+            <a:schemeClr val="lt1"/>
+          </a:fontRef>
+        </p:style>
+        <p:txBody>
+          <a:bodyPr rtlCol="0" anchor="ctr"/>
+          <a:lstStyle/>
+          <a:p>
+            <a:pPr algn="ctr"/>
+          </a:p>
+        </p:txBody>
+      </p:sp>
+      <p:sp>
+        <p:nvSpPr>
+          <p:cNvPr id="35" name="Rectangle 34"/>
+          <p:cNvSpPr/>
+          <p:nvPr/>
+        </p:nvSpPr>
+        <p:spPr>
+          <a:xfrm>
+            <a:off x="8054928" y="2418588"/>
+            <a:ext cx="55000" cy="397900"/>
+          </a:xfrm>
+          <a:prstGeom prst="rect">
+            <a:avLst/>
+          </a:prstGeom>
+          <a:solidFill>
+            <a:srgbClr val="C8A840"/>
+          </a:solidFill>
+          <a:ln>
+            <a:noFill/>
+          </a:ln>
+        </p:spPr>
+        <p:style>
+          <a:lnRef idx="1">
+            <a:schemeClr val="accent1"/>
+          </a:lnRef>
+          <a:fillRef idx="3">
+            <a:schemeClr val="accent1"/>
+          </a:fillRef>
+          <a:effectRef idx="2">
+            <a:schemeClr val="accent1"/>
+          </a:effectRef>
+          <a:fontRef idx="minor">
+            <a:schemeClr val="lt1"/>
+          </a:fontRef>
+        </p:style>
+        <p:txBody>
+          <a:bodyPr rtlCol="0" anchor="ctr"/>
+          <a:lstStyle/>
+          <a:p>
+            <a:pPr algn="ctr"/>
+          </a:p>
+        </p:txBody>
+      </p:sp>
+      <p:sp>
+        <p:nvSpPr>
+          <p:cNvPr id="36" name="TextBox 35"/>
+          <p:cNvSpPr txBox="1"/>
+          <p:nvPr/>
+        </p:nvSpPr>
+        <p:spPr>
+          <a:xfrm>
+            <a:off x="7449928" y="2038588"/>
+            <a:ext cx="790000" cy="360000"/>
+          </a:xfrm>
+          <a:prstGeom prst="rect">
+            <a:avLst/>
+          </a:prstGeom>
+          <a:noFill/>
+        </p:spPr>
+        <p:txBody>
+          <a:bodyPr wrap="square">
+            <a:spAutoFit/>
+          </a:bodyPr>
+          <a:lstStyle/>
+          <a:p>
+            <a:pPr algn="ctr"/>
+            <a:r>
+              <a:rPr sz="800" b="1">
+                <a:solidFill>
+                  <a:srgbClr val="FFD700"/>
+                </a:solidFill>
+                <a:latin typeface="メイリオ"/>
+              </a:rPr>
+              <a:t>8セット
+完走</a:t>
+            </a:r>
+          </a:p>
+        </p:txBody>
+      </p:sp>
+      <p:sp>
+        <p:nvSpPr>
+          <p:cNvPr id="37" name="Rectangle 36"/>
+          <p:cNvSpPr/>
+          <p:nvPr/>
+        </p:nvSpPr>
+        <p:spPr>
+          <a:xfrm>
+            <a:off x="5138928" y="2761488"/>
+            <a:ext cx="2286000" cy="804672"/>
+          </a:xfrm>
+          <a:prstGeom prst="rect">
+            <a:avLst/>
+          </a:prstGeom>
+          <a:solidFill>
+            <a:srgbClr val="261600"/>
+          </a:solidFill>
+          <a:ln w="22860">
+            <a:solidFill>
+              <a:srgbClr val="C8A840"/>
+            </a:solidFill>
+          </a:ln>
+        </p:spPr>
+        <p:style>
+          <a:lnRef idx="1">
+            <a:schemeClr val="accent1"/>
+          </a:lnRef>
+          <a:fillRef idx="3">
+            <a:schemeClr val="accent1"/>
+          </a:fillRef>
+          <a:effectRef idx="2">
+            <a:schemeClr val="accent1"/>
+          </a:effectRef>
+          <a:fontRef idx="minor">
+            <a:schemeClr val="lt1"/>
+          </a:fontRef>
+        </p:style>
+        <p:txBody>
+          <a:bodyPr rtlCol="0" anchor="ctr"/>
+          <a:lstStyle/>
+          <a:p>
+            <a:pPr algn="ctr"/>
+          </a:p>
+        </p:txBody>
+      </p:sp>
+      <p:sp>
+        <p:nvSpPr>
+          <p:cNvPr id="38" name="TextBox 37"/>
+          <p:cNvSpPr txBox="1"/>
+          <p:nvPr/>
+        </p:nvSpPr>
+        <p:spPr>
+          <a:xfrm>
+            <a:off x="5218928" y="2803488"/>
+            <a:ext cx="2126000" cy="265000"/>
+          </a:xfrm>
+          <a:prstGeom prst="rect">
+            <a:avLst/>
+          </a:prstGeom>
+          <a:noFill/>
+        </p:spPr>
+        <p:txBody>
+          <a:bodyPr wrap="square">
+            <a:spAutoFit/>
+          </a:bodyPr>
+          <a:lstStyle/>
+          <a:p>
+            <a:pPr algn="l"/>
+            <a:r>
+              <a:rPr sz="950" b="1">
+                <a:solidFill>
+                  <a:srgbClr val="FFFFFF"/>
+                </a:solidFill>
+                <a:latin typeface="游明朝"/>
+              </a:rPr>
+              <a:t>グランドスラム達成！</a:t>
+            </a:r>
+          </a:p>
+        </p:txBody>
+      </p:sp>
+      <p:sp>
+        <p:nvSpPr>
+          <p:cNvPr id="39" name="TextBox 38"/>
+          <p:cNvSpPr txBox="1"/>
+          <p:nvPr/>
+        </p:nvSpPr>
+        <p:spPr>
+          <a:xfrm>
+            <a:off x="5218928" y="3083488"/>
+            <a:ext cx="2126000" cy="444672"/>
+          </a:xfrm>
+          <a:prstGeom prst="rect">
+            <a:avLst/>
+          </a:prstGeom>
+          <a:noFill/>
+        </p:spPr>
+        <p:txBody>
+          <a:bodyPr wrap="square">
+            <a:spAutoFit/>
+          </a:bodyPr>
+          <a:lstStyle/>
+          <a:p>
+            <a:pPr algn="l"/>
+            <a:r>
+              <a:rPr sz="800" b="0">
+                <a:solidFill>
+                  <a:srgbClr val="E0E8F0"/>
+                </a:solidFill>
+                <a:latin typeface="メイリオ"/>
+              </a:rPr>
+              <a:t>8完走でメインゴール到達
+→ エキシビション（ボーナス）へ</a:t>
+            </a:r>
+          </a:p>
+        </p:txBody>
+      </p:sp>
+      <p:sp>
+        <p:nvSpPr>
+          <p:cNvPr id="40" name="Rectangle 39"/>
+          <p:cNvSpPr/>
+          <p:nvPr/>
+        </p:nvSpPr>
+        <p:spPr>
+          <a:xfrm>
+            <a:off x="2651760" y="2761488"/>
+            <a:ext cx="2286000" cy="804672"/>
+          </a:xfrm>
+          <a:prstGeom prst="rect">
+            <a:avLst/>
+          </a:prstGeom>
+          <a:solidFill>
+            <a:srgbClr val="0C1604"/>
+          </a:solidFill>
+          <a:ln w="22860">
+            <a:solidFill>
+              <a:srgbClr val="FFA020"/>
+            </a:solidFill>
+          </a:ln>
+        </p:spPr>
+        <p:style>
+          <a:lnRef idx="1">
+            <a:schemeClr val="accent1"/>
+          </a:lnRef>
+          <a:fillRef idx="3">
+            <a:schemeClr val="accent1"/>
+          </a:fillRef>
+          <a:effectRef idx="2">
+            <a:schemeClr val="accent1"/>
+          </a:effectRef>
+          <a:fontRef idx="minor">
+            <a:schemeClr val="lt1"/>
+          </a:fontRef>
+        </p:style>
+        <p:txBody>
+          <a:bodyPr rtlCol="0" anchor="ctr"/>
+          <a:lstStyle/>
+          <a:p>
+            <a:pPr algn="ctr"/>
+          </a:p>
+        </p:txBody>
+      </p:sp>
+      <p:sp>
+        <p:nvSpPr>
+          <p:cNvPr id="41" name="TextBox 40"/>
+          <p:cNvSpPr txBox="1"/>
+          <p:nvPr/>
+        </p:nvSpPr>
+        <p:spPr>
+          <a:xfrm>
+            <a:off x="2731760" y="2803488"/>
+            <a:ext cx="2126000" cy="265000"/>
+          </a:xfrm>
+          <a:prstGeom prst="rect">
+            <a:avLst/>
+          </a:prstGeom>
+          <a:noFill/>
+        </p:spPr>
+        <p:txBody>
+          <a:bodyPr wrap="square">
+            <a:spAutoFit/>
+          </a:bodyPr>
+          <a:lstStyle/>
+          <a:p>
+            <a:pPr algn="l"/>
+            <a:r>
+              <a:rPr sz="950" b="1">
+                <a:solidFill>
+                  <a:srgbClr val="FFFFFF"/>
+                </a:solidFill>
+                <a:latin typeface="游明朝"/>
+              </a:rPr>
+              <a:t>エキシビションレース</a:t>
+            </a:r>
+          </a:p>
+        </p:txBody>
+      </p:sp>
+      <p:sp>
+        <p:nvSpPr>
+          <p:cNvPr id="42" name="TextBox 41"/>
+          <p:cNvSpPr txBox="1"/>
+          <p:nvPr/>
+        </p:nvSpPr>
+        <p:spPr>
+          <a:xfrm>
+            <a:off x="2731760" y="3083488"/>
+            <a:ext cx="2126000" cy="444672"/>
+          </a:xfrm>
+          <a:prstGeom prst="rect">
+            <a:avLst/>
+          </a:prstGeom>
+          <a:noFill/>
+        </p:spPr>
+        <p:txBody>
+          <a:bodyPr wrap="square">
+            <a:spAutoFit/>
+          </a:bodyPr>
+          <a:lstStyle/>
+          <a:p>
+            <a:pPr algn="l"/>
+            <a:r>
+              <a:rPr sz="800" b="0">
+                <a:solidFill>
+                  <a:srgbClr val="E0E8F0"/>
+                </a:solidFill>
+                <a:latin typeface="メイリオ"/>
+              </a:rPr>
+              <a:t>グランドスラム後のボーナス区間
+継続率50/66/80/90%に固定</a:t>
+            </a:r>
+          </a:p>
+        </p:txBody>
+      </p:sp>
+      <p:sp>
+        <p:nvSpPr>
+          <p:cNvPr id="43" name="Rectangle 42"/>
+          <p:cNvSpPr/>
+          <p:nvPr/>
+        </p:nvSpPr>
+        <p:spPr>
+          <a:xfrm>
+            <a:off x="164592" y="2761488"/>
+            <a:ext cx="2286000" cy="804672"/>
+          </a:xfrm>
+          <a:prstGeom prst="rect">
+            <a:avLst/>
+          </a:prstGeom>
+          <a:solidFill>
+            <a:srgbClr val="001226"/>
+          </a:solidFill>
+          <a:ln w="22860">
+            <a:solidFill>
+              <a:srgbClr val="00C0C8"/>
+            </a:solidFill>
+          </a:ln>
+        </p:spPr>
+        <p:style>
+          <a:lnRef idx="1">
+            <a:schemeClr val="accent1"/>
+          </a:lnRef>
+          <a:fillRef idx="3">
+            <a:schemeClr val="accent1"/>
+          </a:fillRef>
+          <a:effectRef idx="2">
+            <a:schemeClr val="accent1"/>
+          </a:effectRef>
+          <a:fontRef idx="minor">
+            <a:schemeClr val="lt1"/>
+          </a:fontRef>
+        </p:style>
+        <p:txBody>
+          <a:bodyPr rtlCol="0" anchor="ctr"/>
+          <a:lstStyle/>
+          <a:p>
+            <a:pPr algn="ctr"/>
+          </a:p>
+        </p:txBody>
+      </p:sp>
+      <p:sp>
+        <p:nvSpPr>
+          <p:cNvPr id="44" name="TextBox 43"/>
+          <p:cNvSpPr txBox="1"/>
+          <p:nvPr/>
+        </p:nvSpPr>
+        <p:spPr>
+          <a:xfrm>
+            <a:off x="244592" y="2803488"/>
+            <a:ext cx="2126000" cy="265000"/>
+          </a:xfrm>
+          <a:prstGeom prst="rect">
+            <a:avLst/>
+          </a:prstGeom>
+          <a:noFill/>
+        </p:spPr>
+        <p:txBody>
+          <a:bodyPr wrap="square">
+            <a:spAutoFit/>
+          </a:bodyPr>
+          <a:lstStyle/>
+          <a:p>
+            <a:pPr algn="l"/>
+            <a:r>
+              <a:rPr sz="950" b="1">
+                <a:solidFill>
+                  <a:srgbClr val="FFFFFF"/>
+                </a:solidFill>
+                <a:latin typeface="游明朝"/>
+              </a:rPr>
+              <a:t>上位AT「青島SG」</a:t>
+            </a:r>
+          </a:p>
+        </p:txBody>
+      </p:sp>
+      <p:sp>
+        <p:nvSpPr>
+          <p:cNvPr id="45" name="TextBox 44"/>
+          <p:cNvSpPr txBox="1"/>
+          <p:nvPr/>
+        </p:nvSpPr>
+        <p:spPr>
+          <a:xfrm>
+            <a:off x="244592" y="3083488"/>
+            <a:ext cx="2126000" cy="444672"/>
+          </a:xfrm>
+          <a:prstGeom prst="rect">
+            <a:avLst/>
+          </a:prstGeom>
+          <a:noFill/>
+        </p:spPr>
+        <p:txBody>
+          <a:bodyPr wrap="square">
+            <a:spAutoFit/>
+          </a:bodyPr>
+          <a:lstStyle/>
+          <a:p>
+            <a:pPr algn="l"/>
+            <a:r>
+              <a:rPr sz="800" b="0">
+                <a:solidFill>
+                  <a:srgbClr val="E0E8F0"/>
+                </a:solidFill>
+                <a:latin typeface="メイリオ"/>
+              </a:rPr>
+              <a:t>真の頂点 / 純増4.0枚/G
+継続率83% / 温泉モードあり</a:t>
+            </a:r>
+          </a:p>
+        </p:txBody>
+      </p:sp>
+      <p:sp>
+        <p:nvSpPr>
+          <p:cNvPr id="46" name="Can 45"/>
+          <p:cNvSpPr/>
+          <p:nvPr/>
+        </p:nvSpPr>
+        <p:spPr>
+          <a:xfrm rot="10800000">
+            <a:off x="4977760" y="3088824"/>
+            <a:ext cx="121168" cy="150000"/>
+          </a:xfrm>
+          <a:prstGeom prst="can">
+            <a:avLst/>
+          </a:prstGeom>
+          <a:solidFill>
+            <a:srgbClr val="FFA020"/>
+          </a:solidFill>
+          <a:ln>
+            <a:noFill/>
+          </a:ln>
+        </p:spPr>
+        <p:style>
+          <a:lnRef idx="1">
+            <a:schemeClr val="accent1"/>
+          </a:lnRef>
+          <a:fillRef idx="3">
+            <a:schemeClr val="accent1"/>
+          </a:fillRef>
+          <a:effectRef idx="2">
+            <a:schemeClr val="accent1"/>
+          </a:effectRef>
+          <a:fontRef idx="minor">
+            <a:schemeClr val="lt1"/>
+          </a:fontRef>
+        </p:style>
+        <p:txBody>
+          <a:bodyPr rtlCol="0" anchor="ctr"/>
+          <a:lstStyle/>
+          <a:p>
+            <a:pPr algn="ctr"/>
+          </a:p>
+        </p:txBody>
+      </p:sp>
+      <p:sp>
+        <p:nvSpPr>
+          <p:cNvPr id="47" name="Can 46"/>
+          <p:cNvSpPr/>
+          <p:nvPr/>
+        </p:nvSpPr>
+        <p:spPr>
+          <a:xfrm rot="10800000">
+            <a:off x="2490592" y="3088824"/>
+            <a:ext cx="121168" cy="150000"/>
+          </a:xfrm>
+          <a:prstGeom prst="can">
+            <a:avLst/>
+          </a:prstGeom>
+          <a:solidFill>
+            <a:srgbClr val="FFA020"/>
+          </a:solidFill>
+          <a:ln>
+            <a:noFill/>
+          </a:ln>
+        </p:spPr>
+        <p:style>
+          <a:lnRef idx="1">
+            <a:schemeClr val="accent1"/>
+          </a:lnRef>
+          <a:fillRef idx="3">
+            <a:schemeClr val="accent1"/>
+          </a:fillRef>
+          <a:effectRef idx="2">
+            <a:schemeClr val="accent1"/>
+          </a:effectRef>
+          <a:fontRef idx="minor">
+            <a:schemeClr val="lt1"/>
+          </a:fontRef>
+        </p:style>
+        <p:txBody>
+          <a:bodyPr rtlCol="0" anchor="ctr"/>
+          <a:lstStyle/>
+          <a:p>
+            <a:pPr algn="ctr"/>
+          </a:p>
+        </p:txBody>
+      </p:sp>
+      <p:sp>
+        <p:nvSpPr>
+          <p:cNvPr id="48" name="Rectangle 47"/>
+          <p:cNvSpPr/>
+          <p:nvPr/>
+        </p:nvSpPr>
+        <p:spPr>
+          <a:xfrm>
+            <a:off x="164592" y="3676160"/>
+            <a:ext cx="8814816" cy="820000"/>
+          </a:xfrm>
+          <a:prstGeom prst="rect">
+            <a:avLst/>
+          </a:prstGeom>
+          <a:solidFill>
+            <a:srgbClr val="061020"/>
+          </a:solidFill>
+          <a:ln>
+            <a:noFill/>
+          </a:ln>
+        </p:spPr>
+        <p:style>
+          <a:lnRef idx="1">
+            <a:schemeClr val="accent1"/>
+          </a:lnRef>
+          <a:fillRef idx="3">
+            <a:schemeClr val="accent1"/>
+          </a:fillRef>
+          <a:effectRef idx="2">
+            <a:schemeClr val="accent1"/>
+          </a:effectRef>
+          <a:fontRef idx="minor">
+            <a:schemeClr val="lt1"/>
+          </a:fontRef>
+        </p:style>
+        <p:txBody>
+          <a:bodyPr rtlCol="0" anchor="ctr"/>
+          <a:lstStyle/>
+          <a:p>
+            <a:pPr algn="ctr"/>
+          </a:p>
+        </p:txBody>
+      </p:sp>
+      <p:sp>
+        <p:nvSpPr>
+          <p:cNvPr id="49" name="Rectangle 48"/>
+          <p:cNvSpPr/>
+          <p:nvPr/>
+        </p:nvSpPr>
+        <p:spPr>
+          <a:xfrm>
+            <a:off x="164592" y="3676160"/>
+            <a:ext cx="55000" cy="820000"/>
+          </a:xfrm>
+          <a:prstGeom prst="rect">
             <a:avLst/>
           </a:prstGeom>
           <a:solidFill>
@@ -6558,756 +7871,71 @@
       </p:sp>
       <p:sp>
         <p:nvSpPr>
-          <p:cNvPr id="17" name="Rectangle 16"/>
-          <p:cNvSpPr/>
-          <p:nvPr/>
-        </p:nvSpPr>
-        <p:spPr>
-          <a:xfrm>
-            <a:off x="8190728" y="1046988"/>
-            <a:ext cx="55000" cy="727516"/>
-          </a:xfrm>
-          <a:prstGeom prst="rect">
-            <a:avLst/>
-          </a:prstGeom>
-          <a:solidFill>
-            <a:srgbClr val="C8A840"/>
-          </a:solidFill>
-          <a:ln>
-            <a:noFill/>
-          </a:ln>
-        </p:spPr>
-        <p:style>
-          <a:lnRef idx="1">
-            <a:schemeClr val="accent1"/>
-          </a:lnRef>
-          <a:fillRef idx="3">
-            <a:schemeClr val="accent1"/>
-          </a:fillRef>
-          <a:effectRef idx="2">
-            <a:schemeClr val="accent1"/>
-          </a:effectRef>
-          <a:fontRef idx="minor">
-            <a:schemeClr val="lt1"/>
-          </a:fontRef>
-        </p:style>
-        <p:txBody>
-          <a:bodyPr rtlCol="0" anchor="ctr"/>
-          <a:lstStyle/>
-          <a:p>
-            <a:pPr algn="ctr"/>
-          </a:p>
-        </p:txBody>
-      </p:sp>
-      <p:sp>
-        <p:nvSpPr>
-          <p:cNvPr id="18" name="Rectangle 17"/>
-          <p:cNvSpPr/>
-          <p:nvPr/>
-        </p:nvSpPr>
-        <p:spPr>
-          <a:xfrm>
-            <a:off x="8190728" y="1746504"/>
-            <a:ext cx="605000" cy="55000"/>
-          </a:xfrm>
-          <a:prstGeom prst="rect">
-            <a:avLst/>
-          </a:prstGeom>
-          <a:solidFill>
-            <a:srgbClr val="C8A840"/>
-          </a:solidFill>
-          <a:ln>
-            <a:noFill/>
-          </a:ln>
-        </p:spPr>
-        <p:style>
-          <a:lnRef idx="1">
-            <a:schemeClr val="accent1"/>
-          </a:lnRef>
-          <a:fillRef idx="3">
-            <a:schemeClr val="accent1"/>
-          </a:fillRef>
-          <a:effectRef idx="2">
-            <a:schemeClr val="accent1"/>
-          </a:effectRef>
-          <a:fontRef idx="minor">
-            <a:schemeClr val="lt1"/>
-          </a:fontRef>
-        </p:style>
-        <p:txBody>
-          <a:bodyPr rtlCol="0" anchor="ctr"/>
-          <a:lstStyle/>
-          <a:p>
-            <a:pPr algn="ctr"/>
-          </a:p>
-        </p:txBody>
-      </p:sp>
-      <p:sp>
-        <p:nvSpPr>
-          <p:cNvPr id="19" name="Rectangle 18"/>
-          <p:cNvSpPr/>
-          <p:nvPr/>
-        </p:nvSpPr>
-        <p:spPr>
-          <a:xfrm>
-            <a:off x="8740728" y="1746504"/>
-            <a:ext cx="55000" cy="274456"/>
-          </a:xfrm>
-          <a:prstGeom prst="rect">
-            <a:avLst/>
-          </a:prstGeom>
-          <a:solidFill>
-            <a:srgbClr val="C8A840"/>
-          </a:solidFill>
-          <a:ln>
-            <a:noFill/>
-          </a:ln>
-        </p:spPr>
-        <p:style>
-          <a:lnRef idx="1">
-            <a:schemeClr val="accent1"/>
-          </a:lnRef>
-          <a:fillRef idx="3">
-            <a:schemeClr val="accent1"/>
-          </a:fillRef>
-          <a:effectRef idx="2">
-            <a:schemeClr val="accent1"/>
-          </a:effectRef>
-          <a:fontRef idx="minor">
-            <a:schemeClr val="lt1"/>
-          </a:fontRef>
-        </p:style>
-        <p:txBody>
-          <a:bodyPr rtlCol="0" anchor="ctr"/>
-          <a:lstStyle/>
-          <a:p>
-            <a:pPr algn="ctr"/>
-          </a:p>
-        </p:txBody>
-      </p:sp>
-      <p:sp>
-        <p:nvSpPr>
-          <p:cNvPr id="20" name="TextBox 19"/>
-          <p:cNvSpPr txBox="1"/>
-          <p:nvPr/>
-        </p:nvSpPr>
-        <p:spPr>
-          <a:xfrm>
-            <a:off x="8130728" y="1396504"/>
-            <a:ext cx="800000" cy="330000"/>
-          </a:xfrm>
-          <a:prstGeom prst="rect">
-            <a:avLst/>
-          </a:prstGeom>
-          <a:noFill/>
-        </p:spPr>
-        <p:txBody>
-          <a:bodyPr wrap="square">
-            <a:spAutoFit/>
-          </a:bodyPr>
-          <a:lstStyle/>
-          <a:p>
-            <a:pPr algn="ctr"/>
-            <a:r>
-              <a:rPr sz="800" b="1">
-                <a:solidFill>
-                  <a:srgbClr val="FFD700"/>
-                </a:solidFill>
-                <a:latin typeface="メイリオ"/>
-              </a:rPr>
-              <a:t>8セット
-完走</a:t>
-            </a:r>
-          </a:p>
-        </p:txBody>
-      </p:sp>
-      <p:sp>
-        <p:nvSpPr>
-          <p:cNvPr id="21" name="Rectangle 20"/>
-          <p:cNvSpPr/>
-          <p:nvPr/>
-        </p:nvSpPr>
-        <p:spPr>
-          <a:xfrm>
-            <a:off x="5596128" y="1965960"/>
-            <a:ext cx="2514600" cy="960120"/>
-          </a:xfrm>
-          <a:prstGeom prst="rect">
-            <a:avLst/>
-          </a:prstGeom>
-          <a:solidFill>
-            <a:srgbClr val="201400"/>
-          </a:solidFill>
-          <a:ln w="22860">
-            <a:solidFill>
-              <a:srgbClr val="C8A840"/>
-            </a:solidFill>
-          </a:ln>
-        </p:spPr>
-        <p:style>
-          <a:lnRef idx="1">
-            <a:schemeClr val="accent1"/>
-          </a:lnRef>
-          <a:fillRef idx="3">
-            <a:schemeClr val="accent1"/>
-          </a:fillRef>
-          <a:effectRef idx="2">
-            <a:schemeClr val="accent1"/>
-          </a:effectRef>
-          <a:fontRef idx="minor">
-            <a:schemeClr val="lt1"/>
-          </a:fontRef>
-        </p:style>
-        <p:txBody>
-          <a:bodyPr rtlCol="0" anchor="ctr"/>
-          <a:lstStyle/>
-          <a:p>
-            <a:pPr algn="ctr"/>
-          </a:p>
-        </p:txBody>
-      </p:sp>
-      <p:sp>
-        <p:nvSpPr>
-          <p:cNvPr id="22" name="TextBox 21"/>
-          <p:cNvSpPr txBox="1"/>
-          <p:nvPr/>
-        </p:nvSpPr>
-        <p:spPr>
-          <a:xfrm>
-            <a:off x="5676128" y="2015960"/>
-            <a:ext cx="2354600" cy="310000"/>
-          </a:xfrm>
-          <a:prstGeom prst="rect">
-            <a:avLst/>
-          </a:prstGeom>
-          <a:noFill/>
-        </p:spPr>
-        <p:txBody>
-          <a:bodyPr wrap="square">
-            <a:spAutoFit/>
-          </a:bodyPr>
-          <a:lstStyle/>
-          <a:p>
-            <a:pPr algn="l"/>
-            <a:r>
-              <a:rPr sz="950" b="1">
-                <a:solidFill>
-                  <a:srgbClr val="FFFFFF"/>
+          <p:cNvPr id="50" name="TextBox 49"/>
+          <p:cNvSpPr txBox="1"/>
+          <p:nvPr/>
+        </p:nvSpPr>
+        <p:spPr>
+          <a:xfrm>
+            <a:off x="264592" y="3736160"/>
+            <a:ext cx="8412480" cy="290000"/>
+          </a:xfrm>
+          <a:prstGeom prst="rect">
+            <a:avLst/>
+          </a:prstGeom>
+          <a:noFill/>
+        </p:spPr>
+        <p:txBody>
+          <a:bodyPr wrap="square">
+            <a:spAutoFit/>
+          </a:bodyPr>
+          <a:lstStyle/>
+          <a:p>
+            <a:pPr algn="l"/>
+            <a:r>
+              <a:rPr sz="900" b="1">
+                <a:solidFill>
+                  <a:srgbClr val="14887C"/>
                 </a:solidFill>
                 <a:latin typeface="游明朝"/>
               </a:rPr>
-              <a:t>グランドスラム</a:t>
-            </a:r>
-          </a:p>
-        </p:txBody>
-      </p:sp>
-      <p:sp>
-        <p:nvSpPr>
-          <p:cNvPr id="23" name="TextBox 22"/>
-          <p:cNvSpPr txBox="1"/>
-          <p:nvPr/>
-        </p:nvSpPr>
-        <p:spPr>
-          <a:xfrm>
-            <a:off x="5676128" y="2335960"/>
-            <a:ext cx="2354600" cy="540120"/>
-          </a:xfrm>
-          <a:prstGeom prst="rect">
-            <a:avLst/>
-          </a:prstGeom>
-          <a:noFill/>
-        </p:spPr>
-        <p:txBody>
-          <a:bodyPr wrap="square">
-            <a:spAutoFit/>
-          </a:bodyPr>
-          <a:lstStyle/>
-          <a:p>
-            <a:pPr algn="l"/>
-            <a:r>
-              <a:rPr sz="800" b="0">
+              <a:t>フロー設計の核心：「グランドスラム（8完走）を目指す」ことが来店動機のすべてになる</a:t>
+            </a:r>
+          </a:p>
+        </p:txBody>
+      </p:sp>
+      <p:sp>
+        <p:nvSpPr>
+          <p:cNvPr id="51" name="TextBox 50"/>
+          <p:cNvSpPr txBox="1"/>
+          <p:nvPr/>
+        </p:nvSpPr>
+        <p:spPr>
+          <a:xfrm>
+            <a:off x="264592" y="4051160"/>
+            <a:ext cx="8412480" cy="405000"/>
+          </a:xfrm>
+          <a:prstGeom prst="rect">
+            <a:avLst/>
+          </a:prstGeom>
+          <a:noFill/>
+        </p:spPr>
+        <p:txBody>
+          <a:bodyPr wrap="square">
+            <a:spAutoFit/>
+          </a:bodyPr>
+          <a:lstStyle/>
+          <a:p>
+            <a:pPr algn="l"/>
+            <a:r>
+              <a:rPr sz="850" b="0">
                 <a:solidFill>
                   <a:srgbClr val="E0E8F0"/>
                 </a:solidFill>
                 <a:latin typeface="メイリオ"/>
               </a:rPr>
-              <a:t>8セット完走で達成
-→ エキシビションレースへ</a:t>
-            </a:r>
-          </a:p>
-        </p:txBody>
-      </p:sp>
-      <p:sp>
-        <p:nvSpPr>
-          <p:cNvPr id="24" name="Rectangle 23"/>
-          <p:cNvSpPr/>
-          <p:nvPr/>
-        </p:nvSpPr>
-        <p:spPr>
-          <a:xfrm>
-            <a:off x="2880360" y="1965960"/>
-            <a:ext cx="2514600" cy="960120"/>
-          </a:xfrm>
-          <a:prstGeom prst="rect">
-            <a:avLst/>
-          </a:prstGeom>
-          <a:solidFill>
-            <a:srgbClr val="101806"/>
-          </a:solidFill>
-          <a:ln w="22860">
-            <a:solidFill>
-              <a:srgbClr val="FFA020"/>
-            </a:solidFill>
-          </a:ln>
-        </p:spPr>
-        <p:style>
-          <a:lnRef idx="1">
-            <a:schemeClr val="accent1"/>
-          </a:lnRef>
-          <a:fillRef idx="3">
-            <a:schemeClr val="accent1"/>
-          </a:fillRef>
-          <a:effectRef idx="2">
-            <a:schemeClr val="accent1"/>
-          </a:effectRef>
-          <a:fontRef idx="minor">
-            <a:schemeClr val="lt1"/>
-          </a:fontRef>
-        </p:style>
-        <p:txBody>
-          <a:bodyPr rtlCol="0" anchor="ctr"/>
-          <a:lstStyle/>
-          <a:p>
-            <a:pPr algn="ctr"/>
-          </a:p>
-        </p:txBody>
-      </p:sp>
-      <p:sp>
-        <p:nvSpPr>
-          <p:cNvPr id="25" name="TextBox 24"/>
-          <p:cNvSpPr txBox="1"/>
-          <p:nvPr/>
-        </p:nvSpPr>
-        <p:spPr>
-          <a:xfrm>
-            <a:off x="2960360" y="2015960"/>
-            <a:ext cx="2354600" cy="310000"/>
-          </a:xfrm>
-          <a:prstGeom prst="rect">
-            <a:avLst/>
-          </a:prstGeom>
-          <a:noFill/>
-        </p:spPr>
-        <p:txBody>
-          <a:bodyPr wrap="square">
-            <a:spAutoFit/>
-          </a:bodyPr>
-          <a:lstStyle/>
-          <a:p>
-            <a:pPr algn="l"/>
-            <a:r>
-              <a:rPr sz="950" b="1">
-                <a:solidFill>
-                  <a:srgbClr val="FFFFFF"/>
-                </a:solidFill>
-                <a:latin typeface="游明朝"/>
-              </a:rPr>
-              <a:t>エキシビションレース</a:t>
-            </a:r>
-          </a:p>
-        </p:txBody>
-      </p:sp>
-      <p:sp>
-        <p:nvSpPr>
-          <p:cNvPr id="26" name="TextBox 25"/>
-          <p:cNvSpPr txBox="1"/>
-          <p:nvPr/>
-        </p:nvSpPr>
-        <p:spPr>
-          <a:xfrm>
-            <a:off x="2960360" y="2335960"/>
-            <a:ext cx="2354600" cy="540120"/>
-          </a:xfrm>
-          <a:prstGeom prst="rect">
-            <a:avLst/>
-          </a:prstGeom>
-          <a:noFill/>
-        </p:spPr>
-        <p:txBody>
-          <a:bodyPr wrap="square">
-            <a:spAutoFit/>
-          </a:bodyPr>
-          <a:lstStyle/>
-          <a:p>
-            <a:pPr algn="l"/>
-            <a:r>
-              <a:rPr sz="800" b="0">
-                <a:solidFill>
-                  <a:srgbClr val="E0E8F0"/>
-                </a:solidFill>
-                <a:latin typeface="メイリオ"/>
-              </a:rPr>
-              <a:t>継続率50/66/80/90%に固定
-漏れると青島VS波多野へ</a:t>
-            </a:r>
-          </a:p>
-        </p:txBody>
-      </p:sp>
-      <p:sp>
-        <p:nvSpPr>
-          <p:cNvPr id="27" name="Rectangle 26"/>
-          <p:cNvSpPr/>
-          <p:nvPr/>
-        </p:nvSpPr>
-        <p:spPr>
-          <a:xfrm>
-            <a:off x="164592" y="1965960"/>
-            <a:ext cx="2514600" cy="960120"/>
-          </a:xfrm>
-          <a:prstGeom prst="rect">
-            <a:avLst/>
-          </a:prstGeom>
-          <a:solidFill>
-            <a:srgbClr val="001428"/>
-          </a:solidFill>
-          <a:ln w="22860">
-            <a:solidFill>
-              <a:srgbClr val="00C0C8"/>
-            </a:solidFill>
-          </a:ln>
-        </p:spPr>
-        <p:style>
-          <a:lnRef idx="1">
-            <a:schemeClr val="accent1"/>
-          </a:lnRef>
-          <a:fillRef idx="3">
-            <a:schemeClr val="accent1"/>
-          </a:fillRef>
-          <a:effectRef idx="2">
-            <a:schemeClr val="accent1"/>
-          </a:effectRef>
-          <a:fontRef idx="minor">
-            <a:schemeClr val="lt1"/>
-          </a:fontRef>
-        </p:style>
-        <p:txBody>
-          <a:bodyPr rtlCol="0" anchor="ctr"/>
-          <a:lstStyle/>
-          <a:p>
-            <a:pPr algn="ctr"/>
-          </a:p>
-        </p:txBody>
-      </p:sp>
-      <p:sp>
-        <p:nvSpPr>
-          <p:cNvPr id="28" name="TextBox 27"/>
-          <p:cNvSpPr txBox="1"/>
-          <p:nvPr/>
-        </p:nvSpPr>
-        <p:spPr>
-          <a:xfrm>
-            <a:off x="244592" y="2015960"/>
-            <a:ext cx="2354600" cy="310000"/>
-          </a:xfrm>
-          <a:prstGeom prst="rect">
-            <a:avLst/>
-          </a:prstGeom>
-          <a:noFill/>
-        </p:spPr>
-        <p:txBody>
-          <a:bodyPr wrap="square">
-            <a:spAutoFit/>
-          </a:bodyPr>
-          <a:lstStyle/>
-          <a:p>
-            <a:pPr algn="l"/>
-            <a:r>
-              <a:rPr sz="950" b="1">
-                <a:solidFill>
-                  <a:srgbClr val="FFFFFF"/>
-                </a:solidFill>
-                <a:latin typeface="游明朝"/>
-              </a:rPr>
-              <a:t>上位AT「青島SG」</a:t>
-            </a:r>
-          </a:p>
-        </p:txBody>
-      </p:sp>
-      <p:sp>
-        <p:nvSpPr>
-          <p:cNvPr id="29" name="TextBox 28"/>
-          <p:cNvSpPr txBox="1"/>
-          <p:nvPr/>
-        </p:nvSpPr>
-        <p:spPr>
-          <a:xfrm>
-            <a:off x="244592" y="2335960"/>
-            <a:ext cx="2354600" cy="540120"/>
-          </a:xfrm>
-          <a:prstGeom prst="rect">
-            <a:avLst/>
-          </a:prstGeom>
-          <a:noFill/>
-        </p:spPr>
-        <p:txBody>
-          <a:bodyPr wrap="square">
-            <a:spAutoFit/>
-          </a:bodyPr>
-          <a:lstStyle/>
-          <a:p>
-            <a:pPr algn="l"/>
-            <a:r>
-              <a:rPr sz="800" b="0">
-                <a:solidFill>
-                  <a:srgbClr val="E0E8F0"/>
-                </a:solidFill>
-                <a:latin typeface="メイリオ"/>
-              </a:rPr>
-              <a:t>純増4.0枚/G / 継続率83%
-温泉モード（特化ゾーン）あり</a:t>
-            </a:r>
-          </a:p>
-        </p:txBody>
-      </p:sp>
-      <p:sp>
-        <p:nvSpPr>
-          <p:cNvPr id="30" name="Can 29"/>
-          <p:cNvSpPr/>
-          <p:nvPr/>
-        </p:nvSpPr>
-        <p:spPr>
-          <a:xfrm rot="10800000">
-            <a:off x="5434960" y="2371020"/>
-            <a:ext cx="121168" cy="150000"/>
-          </a:xfrm>
-          <a:prstGeom prst="can">
-            <a:avLst/>
-          </a:prstGeom>
-          <a:solidFill>
-            <a:srgbClr val="FFA020"/>
-          </a:solidFill>
-          <a:ln>
-            <a:noFill/>
-          </a:ln>
-        </p:spPr>
-        <p:style>
-          <a:lnRef idx="1">
-            <a:schemeClr val="accent1"/>
-          </a:lnRef>
-          <a:fillRef idx="3">
-            <a:schemeClr val="accent1"/>
-          </a:fillRef>
-          <a:effectRef idx="2">
-            <a:schemeClr val="accent1"/>
-          </a:effectRef>
-          <a:fontRef idx="minor">
-            <a:schemeClr val="lt1"/>
-          </a:fontRef>
-        </p:style>
-        <p:txBody>
-          <a:bodyPr rtlCol="0" anchor="ctr"/>
-          <a:lstStyle/>
-          <a:p>
-            <a:pPr algn="ctr"/>
-          </a:p>
-        </p:txBody>
-      </p:sp>
-      <p:sp>
-        <p:nvSpPr>
-          <p:cNvPr id="31" name="Can 30"/>
-          <p:cNvSpPr/>
-          <p:nvPr/>
-        </p:nvSpPr>
-        <p:spPr>
-          <a:xfrm rot="10800000">
-            <a:off x="2719192" y="2371020"/>
-            <a:ext cx="121168" cy="150000"/>
-          </a:xfrm>
-          <a:prstGeom prst="can">
-            <a:avLst/>
-          </a:prstGeom>
-          <a:solidFill>
-            <a:srgbClr val="FFA020"/>
-          </a:solidFill>
-          <a:ln>
-            <a:noFill/>
-          </a:ln>
-        </p:spPr>
-        <p:style>
-          <a:lnRef idx="1">
-            <a:schemeClr val="accent1"/>
-          </a:lnRef>
-          <a:fillRef idx="3">
-            <a:schemeClr val="accent1"/>
-          </a:fillRef>
-          <a:effectRef idx="2">
-            <a:schemeClr val="accent1"/>
-          </a:effectRef>
-          <a:fontRef idx="minor">
-            <a:schemeClr val="lt1"/>
-          </a:fontRef>
-        </p:style>
-        <p:txBody>
-          <a:bodyPr rtlCol="0" anchor="ctr"/>
-          <a:lstStyle/>
-          <a:p>
-            <a:pPr algn="ctr"/>
-          </a:p>
-        </p:txBody>
-      </p:sp>
-      <p:sp>
-        <p:nvSpPr>
-          <p:cNvPr id="32" name="Rectangle 31"/>
-          <p:cNvSpPr/>
-          <p:nvPr/>
-        </p:nvSpPr>
-        <p:spPr>
-          <a:xfrm>
-            <a:off x="164592" y="3090672"/>
-            <a:ext cx="8814816" cy="880000"/>
-          </a:xfrm>
-          <a:prstGeom prst="rect">
-            <a:avLst/>
-          </a:prstGeom>
-          <a:solidFill>
-            <a:srgbClr val="061020"/>
-          </a:solidFill>
-          <a:ln>
-            <a:noFill/>
-          </a:ln>
-        </p:spPr>
-        <p:style>
-          <a:lnRef idx="1">
-            <a:schemeClr val="accent1"/>
-          </a:lnRef>
-          <a:fillRef idx="3">
-            <a:schemeClr val="accent1"/>
-          </a:fillRef>
-          <a:effectRef idx="2">
-            <a:schemeClr val="accent1"/>
-          </a:effectRef>
-          <a:fontRef idx="minor">
-            <a:schemeClr val="lt1"/>
-          </a:fontRef>
-        </p:style>
-        <p:txBody>
-          <a:bodyPr rtlCol="0" anchor="ctr"/>
-          <a:lstStyle/>
-          <a:p>
-            <a:pPr algn="ctr"/>
-          </a:p>
-        </p:txBody>
-      </p:sp>
-      <p:sp>
-        <p:nvSpPr>
-          <p:cNvPr id="33" name="Rectangle 32"/>
-          <p:cNvSpPr/>
-          <p:nvPr/>
-        </p:nvSpPr>
-        <p:spPr>
-          <a:xfrm>
-            <a:off x="164592" y="3090672"/>
-            <a:ext cx="55000" cy="880000"/>
-          </a:xfrm>
-          <a:prstGeom prst="rect">
-            <a:avLst/>
-          </a:prstGeom>
-          <a:solidFill>
-            <a:srgbClr val="14887C"/>
-          </a:solidFill>
-          <a:ln>
-            <a:noFill/>
-          </a:ln>
-        </p:spPr>
-        <p:style>
-          <a:lnRef idx="1">
-            <a:schemeClr val="accent1"/>
-          </a:lnRef>
-          <a:fillRef idx="3">
-            <a:schemeClr val="accent1"/>
-          </a:fillRef>
-          <a:effectRef idx="2">
-            <a:schemeClr val="accent1"/>
-          </a:effectRef>
-          <a:fontRef idx="minor">
-            <a:schemeClr val="lt1"/>
-          </a:fontRef>
-        </p:style>
-        <p:txBody>
-          <a:bodyPr rtlCol="0" anchor="ctr"/>
-          <a:lstStyle/>
-          <a:p>
-            <a:pPr algn="ctr"/>
-          </a:p>
-        </p:txBody>
-      </p:sp>
-      <p:sp>
-        <p:nvSpPr>
-          <p:cNvPr id="34" name="TextBox 33"/>
-          <p:cNvSpPr txBox="1"/>
-          <p:nvPr/>
-        </p:nvSpPr>
-        <p:spPr>
-          <a:xfrm>
-            <a:off x="264592" y="3160672"/>
-            <a:ext cx="8412480" cy="310000"/>
-          </a:xfrm>
-          <a:prstGeom prst="rect">
-            <a:avLst/>
-          </a:prstGeom>
-          <a:noFill/>
-        </p:spPr>
-        <p:txBody>
-          <a:bodyPr wrap="square">
-            <a:spAutoFit/>
-          </a:bodyPr>
-          <a:lstStyle/>
-          <a:p>
-            <a:pPr algn="l"/>
-            <a:r>
-              <a:rPr sz="900" b="1">
-                <a:solidFill>
-                  <a:srgbClr val="14887C"/>
-                </a:solidFill>
-                <a:latin typeface="游明朝"/>
-              </a:rPr>
-              <a:t>フロー設計のポイント：「到達ルートが複数ある」と「昇格先がある」の2重構造</a:t>
-            </a:r>
-          </a:p>
-        </p:txBody>
-      </p:sp>
-      <p:sp>
-        <p:nvSpPr>
-          <p:cNvPr id="35" name="TextBox 34"/>
-          <p:cNvSpPr txBox="1"/>
-          <p:nvPr/>
-        </p:nvSpPr>
-        <p:spPr>
-          <a:xfrm>
-            <a:off x="264592" y="3510672"/>
-            <a:ext cx="8412480" cy="400000"/>
-          </a:xfrm>
-          <a:prstGeom prst="rect">
-            <a:avLst/>
-          </a:prstGeom>
-          <a:noFill/>
-        </p:spPr>
-        <p:txBody>
-          <a:bodyPr wrap="square">
-            <a:spAutoFit/>
-          </a:bodyPr>
-          <a:lstStyle/>
-          <a:p>
-            <a:pPr algn="l"/>
-            <a:r>
-              <a:rPr sz="850" b="0">
-                <a:solidFill>
-                  <a:srgbClr val="E0E8F0"/>
-                </a:solidFill>
-                <a:latin typeface="メイリオ"/>
-              </a:rPr>
-              <a:t>通常周期からSG RUSH → 8セット完走 → 上位AT青島SG という段階的昇格が来店を通じた目標になる。
-失敗してもグランドスラムCH経由の救済ルートがあり、「どこかで報われる」設計。</a:t>
+              <a:t>優出モード（周期天井）とCZ直撃の2ルートでAT突入。AT後はシナリオ14種で継続率が決まり8完走を狙う。
+CZ失敗の1.2%でGSC（AT確定・艇王シナリオ）という逆転も存在。失敗にも次がある設計。</a:t>
             </a:r>
           </a:p>
         </p:txBody>
@@ -10963,7 +11591,7 @@
         <p:spPr>
           <a:xfrm>
             <a:off x="484632" y="1627632"/>
-            <a:ext cx="3474720" cy="260000"/>
+            <a:ext cx="3474720" cy="300000"/>
           </a:xfrm>
           <a:prstGeom prst="rect">
             <a:avLst/>
@@ -10984,8 +11612,8 @@
                 </a:solidFill>
                 <a:latin typeface="メイリオ"/>
               </a:rPr>
-              <a:t>上乗せ・特化ゾーン「バカンスモード」抽選
-V揃いでカットイン / ボートで50G以上上乗せ</a:t>
+              <a:t>上乗せ・特化ゾーン「バカンスモード」（30G）抽選
+V揃いカットイン / 強役で50G以上上乗せ</a:t>
             </a:r>
           </a:p>
         </p:txBody>
@@ -10993,84 +11621,6 @@
       <p:sp>
         <p:nvSpPr>
           <p:cNvPr id="12" name="Rectangle 11"/>
-          <p:cNvSpPr/>
-          <p:nvPr/>
-        </p:nvSpPr>
-        <p:spPr>
-          <a:xfrm>
-            <a:off x="1645920" y="1737360"/>
-            <a:ext cx="1371600" cy="180000"/>
-          </a:xfrm>
-          <a:prstGeom prst="rect">
-            <a:avLst/>
-          </a:prstGeom>
-          <a:solidFill>
-            <a:srgbClr val="001428"/>
-          </a:solidFill>
-          <a:ln>
-            <a:noFill/>
-          </a:ln>
-        </p:spPr>
-        <p:style>
-          <a:lnRef idx="1">
-            <a:schemeClr val="accent1"/>
-          </a:lnRef>
-          <a:fillRef idx="3">
-            <a:schemeClr val="accent1"/>
-          </a:fillRef>
-          <a:effectRef idx="2">
-            <a:schemeClr val="accent1"/>
-          </a:effectRef>
-          <a:fontRef idx="minor">
-            <a:schemeClr val="lt1"/>
-          </a:fontRef>
-        </p:style>
-        <p:txBody>
-          <a:bodyPr rtlCol="0" anchor="ctr"/>
-          <a:lstStyle/>
-          <a:p>
-            <a:pPr algn="ctr"/>
-          </a:p>
-        </p:txBody>
-      </p:sp>
-      <p:sp>
-        <p:nvSpPr>
-          <p:cNvPr id="13" name="TextBox 12"/>
-          <p:cNvSpPr txBox="1"/>
-          <p:nvPr/>
-        </p:nvSpPr>
-        <p:spPr>
-          <a:xfrm>
-            <a:off x="1645920" y="1792224"/>
-            <a:ext cx="1371600" cy="160000"/>
-          </a:xfrm>
-          <a:prstGeom prst="rect">
-            <a:avLst/>
-          </a:prstGeom>
-          <a:noFill/>
-        </p:spPr>
-        <p:txBody>
-          <a:bodyPr wrap="square">
-            <a:spAutoFit/>
-          </a:bodyPr>
-          <a:lstStyle/>
-          <a:p>
-            <a:pPr algn="ctr"/>
-            <a:r>
-              <a:rPr sz="750" b="0">
-                <a:solidFill>
-                  <a:srgbClr val="00C0C8"/>
-                </a:solidFill>
-                <a:latin typeface="メイリオ"/>
-              </a:rPr>
-              <a:t>バカンスモード突入</a:t>
-            </a:r>
-          </a:p>
-        </p:txBody>
-      </p:sp>
-      <p:sp>
-        <p:nvSpPr>
-          <p:cNvPr id="14" name="Rectangle 13"/>
           <p:cNvSpPr/>
           <p:nvPr/>
         </p:nvSpPr>
@@ -11113,7 +11663,7 @@
       </p:sp>
       <p:sp>
         <p:nvSpPr>
-          <p:cNvPr id="15" name="Rectangle 14"/>
+          <p:cNvPr id="13" name="Rectangle 12"/>
           <p:cNvSpPr/>
           <p:nvPr/>
         </p:nvSpPr>
@@ -11156,7 +11706,7 @@
       </p:sp>
       <p:sp>
         <p:nvSpPr>
-          <p:cNvPr id="16" name="TextBox 15"/>
+          <p:cNvPr id="14" name="TextBox 13"/>
           <p:cNvSpPr txBox="1"/>
           <p:nvPr/>
         </p:nvSpPr>
@@ -11191,7 +11741,7 @@
       </p:sp>
       <p:sp>
         <p:nvSpPr>
-          <p:cNvPr id="17" name="TextBox 16"/>
+          <p:cNvPr id="15" name="TextBox 14"/>
           <p:cNvSpPr txBox="1"/>
           <p:nvPr/>
         </p:nvSpPr>
@@ -11227,7 +11777,7 @@
       </p:sp>
       <p:sp>
         <p:nvSpPr>
-          <p:cNvPr id="18" name="Rectangle 17"/>
+          <p:cNvPr id="16" name="Rectangle 15"/>
           <p:cNvSpPr/>
           <p:nvPr/>
         </p:nvSpPr>
@@ -11272,7 +11822,7 @@
       </p:sp>
       <p:sp>
         <p:nvSpPr>
-          <p:cNvPr id="19" name="TextBox 18"/>
+          <p:cNvPr id="17" name="TextBox 16"/>
           <p:cNvSpPr txBox="1"/>
           <p:nvPr/>
         </p:nvSpPr>
@@ -11307,7 +11857,7 @@
       </p:sp>
       <p:sp>
         <p:nvSpPr>
-          <p:cNvPr id="20" name="TextBox 19"/>
+          <p:cNvPr id="18" name="TextBox 17"/>
           <p:cNvSpPr txBox="1"/>
           <p:nvPr/>
         </p:nvSpPr>
@@ -11343,7 +11893,7 @@
       </p:sp>
       <p:sp>
         <p:nvSpPr>
-          <p:cNvPr id="21" name="Rectangle 20"/>
+          <p:cNvPr id="19" name="Rectangle 18"/>
           <p:cNvSpPr/>
           <p:nvPr/>
         </p:nvSpPr>
@@ -11388,7 +11938,7 @@
       </p:sp>
       <p:sp>
         <p:nvSpPr>
-          <p:cNvPr id="22" name="TextBox 21"/>
+          <p:cNvPr id="20" name="TextBox 19"/>
           <p:cNvSpPr txBox="1"/>
           <p:nvPr/>
         </p:nvSpPr>
@@ -11423,7 +11973,7 @@
       </p:sp>
       <p:sp>
         <p:nvSpPr>
-          <p:cNvPr id="23" name="TextBox 22"/>
+          <p:cNvPr id="21" name="TextBox 20"/>
           <p:cNvSpPr txBox="1"/>
           <p:nvPr/>
         </p:nvSpPr>
@@ -11458,7 +12008,7 @@
       </p:sp>
       <p:sp>
         <p:nvSpPr>
-          <p:cNvPr id="24" name="Rectangle 23"/>
+          <p:cNvPr id="22" name="Rectangle 21"/>
           <p:cNvSpPr/>
           <p:nvPr/>
         </p:nvSpPr>
@@ -11501,7 +12051,7 @@
       </p:sp>
       <p:sp>
         <p:nvSpPr>
-          <p:cNvPr id="25" name="TextBox 24"/>
+          <p:cNvPr id="23" name="TextBox 22"/>
           <p:cNvSpPr txBox="1"/>
           <p:nvPr/>
         </p:nvSpPr>
@@ -11536,7 +12086,7 @@
       </p:sp>
       <p:sp>
         <p:nvSpPr>
-          <p:cNvPr id="26" name="TextBox 25"/>
+          <p:cNvPr id="24" name="TextBox 23"/>
           <p:cNvSpPr txBox="1"/>
           <p:nvPr/>
         </p:nvSpPr>
@@ -11571,7 +12121,7 @@
       </p:sp>
       <p:sp>
         <p:nvSpPr>
-          <p:cNvPr id="27" name="TextBox 26"/>
+          <p:cNvPr id="25" name="TextBox 24"/>
           <p:cNvSpPr txBox="1"/>
           <p:nvPr/>
         </p:nvSpPr>
@@ -11606,7 +12156,7 @@
       </p:sp>
       <p:sp>
         <p:nvSpPr>
-          <p:cNvPr id="28" name="Rectangle 27"/>
+          <p:cNvPr id="26" name="Rectangle 25"/>
           <p:cNvSpPr/>
           <p:nvPr/>
         </p:nvSpPr>
@@ -11649,7 +12199,7 @@
       </p:sp>
       <p:sp>
         <p:nvSpPr>
-          <p:cNvPr id="29" name="TextBox 28"/>
+          <p:cNvPr id="27" name="TextBox 26"/>
           <p:cNvSpPr txBox="1"/>
           <p:nvPr/>
         </p:nvSpPr>
@@ -11684,7 +12234,7 @@
       </p:sp>
       <p:sp>
         <p:nvSpPr>
-          <p:cNvPr id="30" name="TextBox 29"/>
+          <p:cNvPr id="28" name="TextBox 27"/>
           <p:cNvSpPr txBox="1"/>
           <p:nvPr/>
         </p:nvSpPr>
@@ -11719,7 +12269,7 @@
       </p:sp>
       <p:sp>
         <p:nvSpPr>
-          <p:cNvPr id="31" name="TextBox 30"/>
+          <p:cNvPr id="29" name="TextBox 28"/>
           <p:cNvSpPr txBox="1"/>
           <p:nvPr/>
         </p:nvSpPr>
@@ -11754,7 +12304,7 @@
       </p:sp>
       <p:sp>
         <p:nvSpPr>
-          <p:cNvPr id="32" name="Rectangle 31"/>
+          <p:cNvPr id="30" name="Rectangle 29"/>
           <p:cNvSpPr/>
           <p:nvPr/>
         </p:nvSpPr>
@@ -11797,7 +12347,7 @@
       </p:sp>
       <p:sp>
         <p:nvSpPr>
-          <p:cNvPr id="33" name="TextBox 32"/>
+          <p:cNvPr id="31" name="TextBox 30"/>
           <p:cNvSpPr txBox="1"/>
           <p:nvPr/>
         </p:nvSpPr>
@@ -11832,7 +12382,7 @@
       </p:sp>
       <p:sp>
         <p:nvSpPr>
-          <p:cNvPr id="34" name="TextBox 33"/>
+          <p:cNvPr id="32" name="TextBox 31"/>
           <p:cNvSpPr txBox="1"/>
           <p:nvPr/>
         </p:nvSpPr>
@@ -11867,7 +12417,7 @@
       </p:sp>
       <p:sp>
         <p:nvSpPr>
-          <p:cNvPr id="35" name="TextBox 34"/>
+          <p:cNvPr id="33" name="TextBox 32"/>
           <p:cNvSpPr txBox="1"/>
           <p:nvPr/>
         </p:nvSpPr>
@@ -11902,7 +12452,7 @@
       </p:sp>
       <p:sp>
         <p:nvSpPr>
-          <p:cNvPr id="36" name="Rectangle 35"/>
+          <p:cNvPr id="34" name="Rectangle 33"/>
           <p:cNvSpPr/>
           <p:nvPr/>
         </p:nvSpPr>
@@ -11945,7 +12495,7 @@
       </p:sp>
       <p:sp>
         <p:nvSpPr>
-          <p:cNvPr id="37" name="TextBox 36"/>
+          <p:cNvPr id="35" name="TextBox 34"/>
           <p:cNvSpPr txBox="1"/>
           <p:nvPr/>
         </p:nvSpPr>
@@ -11980,7 +12530,7 @@
       </p:sp>
       <p:sp>
         <p:nvSpPr>
-          <p:cNvPr id="38" name="TextBox 37"/>
+          <p:cNvPr id="36" name="TextBox 35"/>
           <p:cNvSpPr txBox="1"/>
           <p:nvPr/>
         </p:nvSpPr>
@@ -12015,7 +12565,7 @@
       </p:sp>
       <p:sp>
         <p:nvSpPr>
-          <p:cNvPr id="39" name="TextBox 38"/>
+          <p:cNvPr id="37" name="TextBox 36"/>
           <p:cNvSpPr txBox="1"/>
           <p:nvPr/>
         </p:nvSpPr>
@@ -12050,7 +12600,7 @@
       </p:sp>
       <p:sp>
         <p:nvSpPr>
-          <p:cNvPr id="40" name="Rectangle 39"/>
+          <p:cNvPr id="38" name="Rectangle 37"/>
           <p:cNvSpPr/>
           <p:nvPr/>
         </p:nvSpPr>
@@ -12093,7 +12643,7 @@
       </p:sp>
       <p:sp>
         <p:nvSpPr>
-          <p:cNvPr id="41" name="TextBox 40"/>
+          <p:cNvPr id="39" name="TextBox 38"/>
           <p:cNvSpPr txBox="1"/>
           <p:nvPr/>
         </p:nvSpPr>
@@ -12128,7 +12678,7 @@
       </p:sp>
       <p:sp>
         <p:nvSpPr>
-          <p:cNvPr id="42" name="TextBox 41"/>
+          <p:cNvPr id="40" name="TextBox 39"/>
           <p:cNvSpPr txBox="1"/>
           <p:nvPr/>
         </p:nvSpPr>
@@ -12163,7 +12713,7 @@
       </p:sp>
       <p:sp>
         <p:nvSpPr>
-          <p:cNvPr id="43" name="TextBox 42"/>
+          <p:cNvPr id="41" name="TextBox 40"/>
           <p:cNvSpPr txBox="1"/>
           <p:nvPr/>
         </p:nvSpPr>
@@ -12198,7 +12748,7 @@
       </p:sp>
       <p:sp>
         <p:nvSpPr>
-          <p:cNvPr id="44" name="TextBox 43"/>
+          <p:cNvPr id="42" name="TextBox 41"/>
           <p:cNvSpPr txBox="1"/>
           <p:nvPr/>
         </p:nvSpPr>
@@ -12233,7 +12783,7 @@
       </p:sp>
       <p:sp>
         <p:nvSpPr>
-          <p:cNvPr id="45" name="Rectangle 44"/>
+          <p:cNvPr id="43" name="Rectangle 42"/>
           <p:cNvSpPr/>
           <p:nvPr/>
         </p:nvSpPr>
@@ -12276,7 +12826,7 @@
       </p:sp>
       <p:sp>
         <p:nvSpPr>
-          <p:cNvPr id="46" name="Rectangle 45"/>
+          <p:cNvPr id="44" name="Rectangle 43"/>
           <p:cNvSpPr/>
           <p:nvPr/>
         </p:nvSpPr>
@@ -12319,7 +12869,7 @@
       </p:sp>
       <p:sp>
         <p:nvSpPr>
-          <p:cNvPr id="47" name="TextBox 46"/>
+          <p:cNvPr id="45" name="TextBox 44"/>
           <p:cNvSpPr txBox="1"/>
           <p:nvPr/>
         </p:nvSpPr>
@@ -12354,7 +12904,7 @@
       </p:sp>
       <p:sp>
         <p:nvSpPr>
-          <p:cNvPr id="48" name="TextBox 47"/>
+          <p:cNvPr id="46" name="TextBox 45"/>
           <p:cNvSpPr txBox="1"/>
           <p:nvPr/>
         </p:nvSpPr>
@@ -12389,7 +12939,7 @@
       </p:sp>
       <p:sp>
         <p:nvSpPr>
-          <p:cNvPr id="49" name="TextBox 48"/>
+          <p:cNvPr id="47" name="TextBox 46"/>
           <p:cNvSpPr txBox="1"/>
           <p:nvPr/>
         </p:nvSpPr>
